--- a/2025/LEC/03-1 Экспоненциальное сглаживание и профет.pptx
+++ b/2025/LEC/03-1 Экспоненциальное сглаживание и профет.pptx
@@ -256,7 +256,7 @@
           <a:p>
             <a:fld id="{C730246F-5962-E14A-AAF2-985CCFDAC345}" type="datetimeFigureOut">
               <a:rPr lang="ru-RU" smtClean="0"/>
-              <a:t>15.07.2025</a:t>
+              <a:t>25.07.2025</a:t>
             </a:fld>
             <a:endParaRPr lang="ru-RU"/>
           </a:p>
@@ -1428,7 +1428,7 @@
           <a:p>
             <a:fld id="{44343DC6-30E4-4569-999A-C703F926F2AF}" type="datetimeFigureOut">
               <a:rPr lang="en-US" smtClean="0"/>
-              <a:t>7/15/2025</a:t>
+              <a:t>7/25/2025</a:t>
             </a:fld>
             <a:endParaRPr lang="en-US"/>
           </a:p>
@@ -1628,7 +1628,7 @@
           <a:p>
             <a:fld id="{44343DC6-30E4-4569-999A-C703F926F2AF}" type="datetimeFigureOut">
               <a:rPr lang="en-US" smtClean="0"/>
-              <a:t>7/15/2025</a:t>
+              <a:t>7/25/2025</a:t>
             </a:fld>
             <a:endParaRPr lang="en-US"/>
           </a:p>
@@ -1838,7 +1838,7 @@
           <a:p>
             <a:fld id="{44343DC6-30E4-4569-999A-C703F926F2AF}" type="datetimeFigureOut">
               <a:rPr lang="en-US" smtClean="0"/>
-              <a:t>7/15/2025</a:t>
+              <a:t>7/25/2025</a:t>
             </a:fld>
             <a:endParaRPr lang="en-US"/>
           </a:p>
@@ -2038,7 +2038,7 @@
           <a:p>
             <a:fld id="{44343DC6-30E4-4569-999A-C703F926F2AF}" type="datetimeFigureOut">
               <a:rPr lang="en-US" smtClean="0"/>
-              <a:t>7/15/2025</a:t>
+              <a:t>7/25/2025</a:t>
             </a:fld>
             <a:endParaRPr lang="en-US"/>
           </a:p>
@@ -2314,7 +2314,7 @@
           <a:p>
             <a:fld id="{44343DC6-30E4-4569-999A-C703F926F2AF}" type="datetimeFigureOut">
               <a:rPr lang="en-US" smtClean="0"/>
-              <a:t>7/15/2025</a:t>
+              <a:t>7/25/2025</a:t>
             </a:fld>
             <a:endParaRPr lang="en-US"/>
           </a:p>
@@ -2582,7 +2582,7 @@
           <a:p>
             <a:fld id="{44343DC6-30E4-4569-999A-C703F926F2AF}" type="datetimeFigureOut">
               <a:rPr lang="en-US" smtClean="0"/>
-              <a:t>7/15/2025</a:t>
+              <a:t>7/25/2025</a:t>
             </a:fld>
             <a:endParaRPr lang="en-US"/>
           </a:p>
@@ -2997,7 +2997,7 @@
           <a:p>
             <a:fld id="{44343DC6-30E4-4569-999A-C703F926F2AF}" type="datetimeFigureOut">
               <a:rPr lang="en-US" smtClean="0"/>
-              <a:t>7/15/2025</a:t>
+              <a:t>7/25/2025</a:t>
             </a:fld>
             <a:endParaRPr lang="en-US"/>
           </a:p>
@@ -3139,7 +3139,7 @@
           <a:p>
             <a:fld id="{44343DC6-30E4-4569-999A-C703F926F2AF}" type="datetimeFigureOut">
               <a:rPr lang="en-US" smtClean="0"/>
-              <a:t>7/15/2025</a:t>
+              <a:t>7/25/2025</a:t>
             </a:fld>
             <a:endParaRPr lang="en-US"/>
           </a:p>
@@ -3252,7 +3252,7 @@
           <a:p>
             <a:fld id="{44343DC6-30E4-4569-999A-C703F926F2AF}" type="datetimeFigureOut">
               <a:rPr lang="en-US" smtClean="0"/>
-              <a:t>7/15/2025</a:t>
+              <a:t>7/25/2025</a:t>
             </a:fld>
             <a:endParaRPr lang="en-US"/>
           </a:p>
@@ -3565,7 +3565,7 @@
           <a:p>
             <a:fld id="{44343DC6-30E4-4569-999A-C703F926F2AF}" type="datetimeFigureOut">
               <a:rPr lang="en-US" smtClean="0"/>
-              <a:t>7/15/2025</a:t>
+              <a:t>7/25/2025</a:t>
             </a:fld>
             <a:endParaRPr lang="en-US"/>
           </a:p>
@@ -3854,7 +3854,7 @@
           <a:p>
             <a:fld id="{44343DC6-30E4-4569-999A-C703F926F2AF}" type="datetimeFigureOut">
               <a:rPr lang="en-US" smtClean="0"/>
-              <a:t>7/15/2025</a:t>
+              <a:t>7/25/2025</a:t>
             </a:fld>
             <a:endParaRPr lang="en-US"/>
           </a:p>
@@ -4097,7 +4097,7 @@
           <a:p>
             <a:fld id="{44343DC6-30E4-4569-999A-C703F926F2AF}" type="datetimeFigureOut">
               <a:rPr lang="en-US" smtClean="0"/>
-              <a:t>7/15/2025</a:t>
+              <a:t>7/25/2025</a:t>
             </a:fld>
             <a:endParaRPr lang="en-US"/>
           </a:p>
@@ -15425,6 +15425,34 @@
           </a:p>
         </p:txBody>
       </p:sp>
+      <p:sp>
+        <p:nvSpPr>
+          <p:cNvPr id="5" name="Прямоугольник 4"/>
+          <p:cNvSpPr/>
+          <p:nvPr/>
+        </p:nvSpPr>
+        <p:spPr>
+          <a:xfrm>
+            <a:off x="1073921" y="6212628"/>
+            <a:ext cx="6096000" cy="276999"/>
+          </a:xfrm>
+          <a:prstGeom prst="rect">
+            <a:avLst/>
+          </a:prstGeom>
+        </p:spPr>
+        <p:txBody>
+          <a:bodyPr>
+            <a:spAutoFit/>
+          </a:bodyPr>
+          <a:lstStyle/>
+          <a:p>
+            <a:r>
+              <a:rPr lang="ru-RU" sz="1200" dirty="0"/>
+              <a:t>https://mlcourse.ai/book/topic09/topic9_part2_facebook_prophet.html#topic09-part2</a:t>
+            </a:r>
+          </a:p>
+        </p:txBody>
+      </p:sp>
     </p:spTree>
     <p:extLst>
       <p:ext uri="{BB962C8B-B14F-4D97-AF65-F5344CB8AC3E}">

--- a/2025/LEC/03-1 Экспоненциальное сглаживание и профет.pptx
+++ b/2025/LEC/03-1 Экспоненциальное сглаживание и профет.pptx
@@ -5,7 +5,7 @@
     <p:sldMasterId id="2147483648" r:id="rId1"/>
   </p:sldMasterIdLst>
   <p:notesMasterIdLst>
-    <p:notesMasterId r:id="rId28"/>
+    <p:notesMasterId r:id="rId29"/>
   </p:notesMasterIdLst>
   <p:sldIdLst>
     <p:sldId id="256" r:id="rId2"/>
@@ -34,6 +34,7 @@
     <p:sldId id="443" r:id="rId25"/>
     <p:sldId id="444" r:id="rId26"/>
     <p:sldId id="460" r:id="rId27"/>
+    <p:sldId id="461" r:id="rId28"/>
   </p:sldIdLst>
   <p:sldSz cx="12192000" cy="6858000"/>
   <p:notesSz cx="6858000" cy="9144000"/>
@@ -163,6 +164,7 @@
             <p14:sldId id="443"/>
             <p14:sldId id="444"/>
             <p14:sldId id="460"/>
+            <p14:sldId id="461"/>
           </p14:sldIdLst>
         </p14:section>
       </p14:sectionLst>
@@ -256,7 +258,7 @@
           <a:p>
             <a:fld id="{C730246F-5962-E14A-AAF2-985CCFDAC345}" type="datetimeFigureOut">
               <a:rPr lang="ru-RU" smtClean="0"/>
-              <a:t>25.07.2025</a:t>
+              <a:t>20.08.2025</a:t>
             </a:fld>
             <a:endParaRPr lang="ru-RU"/>
           </a:p>
@@ -1428,7 +1430,7 @@
           <a:p>
             <a:fld id="{44343DC6-30E4-4569-999A-C703F926F2AF}" type="datetimeFigureOut">
               <a:rPr lang="en-US" smtClean="0"/>
-              <a:t>7/25/2025</a:t>
+              <a:t>8/20/2025</a:t>
             </a:fld>
             <a:endParaRPr lang="en-US"/>
           </a:p>
@@ -1628,7 +1630,7 @@
           <a:p>
             <a:fld id="{44343DC6-30E4-4569-999A-C703F926F2AF}" type="datetimeFigureOut">
               <a:rPr lang="en-US" smtClean="0"/>
-              <a:t>7/25/2025</a:t>
+              <a:t>8/20/2025</a:t>
             </a:fld>
             <a:endParaRPr lang="en-US"/>
           </a:p>
@@ -1838,7 +1840,7 @@
           <a:p>
             <a:fld id="{44343DC6-30E4-4569-999A-C703F926F2AF}" type="datetimeFigureOut">
               <a:rPr lang="en-US" smtClean="0"/>
-              <a:t>7/25/2025</a:t>
+              <a:t>8/20/2025</a:t>
             </a:fld>
             <a:endParaRPr lang="en-US"/>
           </a:p>
@@ -2038,7 +2040,7 @@
           <a:p>
             <a:fld id="{44343DC6-30E4-4569-999A-C703F926F2AF}" type="datetimeFigureOut">
               <a:rPr lang="en-US" smtClean="0"/>
-              <a:t>7/25/2025</a:t>
+              <a:t>8/20/2025</a:t>
             </a:fld>
             <a:endParaRPr lang="en-US"/>
           </a:p>
@@ -2314,7 +2316,7 @@
           <a:p>
             <a:fld id="{44343DC6-30E4-4569-999A-C703F926F2AF}" type="datetimeFigureOut">
               <a:rPr lang="en-US" smtClean="0"/>
-              <a:t>7/25/2025</a:t>
+              <a:t>8/20/2025</a:t>
             </a:fld>
             <a:endParaRPr lang="en-US"/>
           </a:p>
@@ -2582,7 +2584,7 @@
           <a:p>
             <a:fld id="{44343DC6-30E4-4569-999A-C703F926F2AF}" type="datetimeFigureOut">
               <a:rPr lang="en-US" smtClean="0"/>
-              <a:t>7/25/2025</a:t>
+              <a:t>8/20/2025</a:t>
             </a:fld>
             <a:endParaRPr lang="en-US"/>
           </a:p>
@@ -2997,7 +2999,7 @@
           <a:p>
             <a:fld id="{44343DC6-30E4-4569-999A-C703F926F2AF}" type="datetimeFigureOut">
               <a:rPr lang="en-US" smtClean="0"/>
-              <a:t>7/25/2025</a:t>
+              <a:t>8/20/2025</a:t>
             </a:fld>
             <a:endParaRPr lang="en-US"/>
           </a:p>
@@ -3139,7 +3141,7 @@
           <a:p>
             <a:fld id="{44343DC6-30E4-4569-999A-C703F926F2AF}" type="datetimeFigureOut">
               <a:rPr lang="en-US" smtClean="0"/>
-              <a:t>7/25/2025</a:t>
+              <a:t>8/20/2025</a:t>
             </a:fld>
             <a:endParaRPr lang="en-US"/>
           </a:p>
@@ -3252,7 +3254,7 @@
           <a:p>
             <a:fld id="{44343DC6-30E4-4569-999A-C703F926F2AF}" type="datetimeFigureOut">
               <a:rPr lang="en-US" smtClean="0"/>
-              <a:t>7/25/2025</a:t>
+              <a:t>8/20/2025</a:t>
             </a:fld>
             <a:endParaRPr lang="en-US"/>
           </a:p>
@@ -3565,7 +3567,7 @@
           <a:p>
             <a:fld id="{44343DC6-30E4-4569-999A-C703F926F2AF}" type="datetimeFigureOut">
               <a:rPr lang="en-US" smtClean="0"/>
-              <a:t>7/25/2025</a:t>
+              <a:t>8/20/2025</a:t>
             </a:fld>
             <a:endParaRPr lang="en-US"/>
           </a:p>
@@ -3854,7 +3856,7 @@
           <a:p>
             <a:fld id="{44343DC6-30E4-4569-999A-C703F926F2AF}" type="datetimeFigureOut">
               <a:rPr lang="en-US" smtClean="0"/>
-              <a:t>7/25/2025</a:t>
+              <a:t>8/20/2025</a:t>
             </a:fld>
             <a:endParaRPr lang="en-US"/>
           </a:p>
@@ -4097,7 +4099,7 @@
           <a:p>
             <a:fld id="{44343DC6-30E4-4569-999A-C703F926F2AF}" type="datetimeFigureOut">
               <a:rPr lang="en-US" smtClean="0"/>
-              <a:t>7/25/2025</a:t>
+              <a:t>8/20/2025</a:t>
             </a:fld>
             <a:endParaRPr lang="en-US"/>
           </a:p>
@@ -17398,6 +17400,191 @@
 </p:sld>
 </file>
 
+<file path=ppt/slides/slide27.xml><?xml version="1.0" encoding="utf-8"?>
+<p:sld xmlns:a="http://schemas.openxmlformats.org/drawingml/2006/main" xmlns:r="http://schemas.openxmlformats.org/officeDocument/2006/relationships" xmlns:p="http://schemas.openxmlformats.org/presentationml/2006/main">
+  <p:cSld>
+    <p:spTree>
+      <p:nvGrpSpPr>
+        <p:cNvPr id="1" name=""/>
+        <p:cNvGrpSpPr/>
+        <p:nvPr/>
+      </p:nvGrpSpPr>
+      <p:grpSpPr>
+        <a:xfrm>
+          <a:off x="0" y="0"/>
+          <a:ext cx="0" cy="0"/>
+          <a:chOff x="0" y="0"/>
+          <a:chExt cx="0" cy="0"/>
+        </a:xfrm>
+      </p:grpSpPr>
+      <p:sp>
+        <p:nvSpPr>
+          <p:cNvPr id="2" name="Заголовок 1"/>
+          <p:cNvSpPr>
+            <a:spLocks noGrp="1"/>
+          </p:cNvSpPr>
+          <p:nvPr>
+            <p:ph type="title"/>
+          </p:nvPr>
+        </p:nvSpPr>
+        <p:spPr>
+          <a:xfrm>
+            <a:off x="299103" y="365125"/>
+            <a:ext cx="11054697" cy="549275"/>
+          </a:xfrm>
+        </p:spPr>
+        <p:txBody>
+          <a:bodyPr>
+            <a:normAutofit fontScale="90000"/>
+          </a:bodyPr>
+          <a:lstStyle/>
+          <a:p>
+            <a:r>
+              <a:rPr lang="ru-RU" dirty="0" smtClean="0"/>
+              <a:t>Вопросы для самоконтроля</a:t>
+            </a:r>
+            <a:endParaRPr lang="ru-RU" dirty="0"/>
+          </a:p>
+        </p:txBody>
+      </p:sp>
+      <p:sp>
+        <p:nvSpPr>
+          <p:cNvPr id="3" name="Объект 2"/>
+          <p:cNvSpPr>
+            <a:spLocks noGrp="1"/>
+          </p:cNvSpPr>
+          <p:nvPr>
+            <p:ph idx="1"/>
+          </p:nvPr>
+        </p:nvSpPr>
+        <p:spPr>
+          <a:xfrm>
+            <a:off x="299103" y="1042586"/>
+            <a:ext cx="11690647" cy="5614587"/>
+          </a:xfrm>
+        </p:spPr>
+        <p:txBody>
+          <a:bodyPr/>
+          <a:lstStyle/>
+          <a:p>
+            <a:pPr lvl="0"/>
+            <a:r>
+              <a:rPr lang="ru-RU" dirty="0"/>
+              <a:t>Объясните основные подходы к экспоненциальному сглаживанию. Какая интуиция сопутствует таким подходам. Где подходы применимы. В каких задачах подходов будет недостаточно и как решить эту проблему?  </a:t>
+            </a:r>
+          </a:p>
+          <a:p>
+            <a:r>
+              <a:rPr lang="ru-RU" dirty="0" smtClean="0"/>
+              <a:t>Объясните почему </a:t>
+            </a:r>
+            <a:r>
+              <a:rPr lang="en-US" dirty="0" smtClean="0"/>
+              <a:t>SES-based </a:t>
+            </a:r>
+            <a:r>
+              <a:rPr lang="ru-RU" dirty="0" smtClean="0"/>
+              <a:t>подходы имеют особое место среди других подходов на основе скользящего среднего. Почему </a:t>
+            </a:r>
+            <a:r>
+              <a:rPr lang="en-US" dirty="0" smtClean="0"/>
+              <a:t>SES – </a:t>
+            </a:r>
+            <a:r>
+              <a:rPr lang="ru-RU" dirty="0" smtClean="0"/>
+              <a:t>итерационный подход? Какая интуиция соответствует переходу от </a:t>
+            </a:r>
+            <a:r>
+              <a:rPr lang="en-US" dirty="0" smtClean="0"/>
+              <a:t>SES </a:t>
+            </a:r>
+            <a:r>
+              <a:rPr lang="ru-RU" dirty="0" smtClean="0"/>
+              <a:t>к </a:t>
+            </a:r>
+            <a:r>
+              <a:rPr lang="en-US" dirty="0" smtClean="0"/>
+              <a:t>DES </a:t>
+            </a:r>
+            <a:r>
+              <a:rPr lang="ru-RU" dirty="0" smtClean="0"/>
+              <a:t>и к </a:t>
+            </a:r>
+            <a:r>
+              <a:rPr lang="en-US" dirty="0" smtClean="0"/>
+              <a:t>TES. </a:t>
+            </a:r>
+            <a:endParaRPr lang="ru-RU" dirty="0" smtClean="0"/>
+          </a:p>
+          <a:p>
+            <a:r>
+              <a:rPr lang="ru-RU" dirty="0" smtClean="0"/>
+              <a:t>Объясните подход </a:t>
+            </a:r>
+            <a:r>
+              <a:rPr lang="en-US" dirty="0" smtClean="0"/>
+              <a:t>TBATS, </a:t>
+            </a:r>
+            <a:r>
+              <a:rPr lang="ru-RU" dirty="0" smtClean="0"/>
+              <a:t>где он используется? Приведите примеры задач где недостаточно </a:t>
+            </a:r>
+            <a:r>
+              <a:rPr lang="en-US" dirty="0" smtClean="0"/>
+              <a:t>ETS </a:t>
+            </a:r>
+            <a:r>
+              <a:rPr lang="ru-RU" dirty="0" smtClean="0"/>
+              <a:t>и нужно использовать </a:t>
+            </a:r>
+            <a:r>
+              <a:rPr lang="en-US" dirty="0" smtClean="0"/>
+              <a:t>TBATS. </a:t>
+            </a:r>
+            <a:r>
+              <a:rPr lang="ru-RU" dirty="0" smtClean="0"/>
+              <a:t>Предложите пути решения таких задач без </a:t>
+            </a:r>
+            <a:r>
+              <a:rPr lang="en-US" dirty="0" smtClean="0"/>
+              <a:t>TBATS</a:t>
+            </a:r>
+            <a:r>
+              <a:rPr lang="ru-RU" dirty="0" smtClean="0"/>
+              <a:t>, в чем их особенность.</a:t>
+            </a:r>
+            <a:endParaRPr lang="en-US" dirty="0" smtClean="0"/>
+          </a:p>
+          <a:p>
+            <a:r>
+              <a:rPr lang="ru-RU" dirty="0" smtClean="0"/>
+              <a:t>Объясните цель использования подходов на основе адаптивной обобщенной регрессии. Какие у подходов достоинства и недостатки. Приведите примеры задач, где такие подходы использовать нельзя (почему такие подходы – не </a:t>
+            </a:r>
+            <a:r>
+              <a:rPr lang="ru-RU" dirty="0" err="1" smtClean="0"/>
+              <a:t>бейзлайн</a:t>
+            </a:r>
+            <a:r>
+              <a:rPr lang="ru-RU" smtClean="0"/>
+              <a:t>?). </a:t>
+            </a:r>
+            <a:endParaRPr lang="ru-RU" dirty="0"/>
+          </a:p>
+        </p:txBody>
+      </p:sp>
+    </p:spTree>
+    <p:extLst>
+      <p:ext uri="{BB962C8B-B14F-4D97-AF65-F5344CB8AC3E}">
+        <p14:creationId xmlns:p14="http://schemas.microsoft.com/office/powerpoint/2010/main" val="3868368480"/>
+      </p:ext>
+    </p:extLst>
+  </p:cSld>
+  <p:clrMapOvr>
+    <a:masterClrMapping/>
+  </p:clrMapOvr>
+</p:sld>
+</file>
+
 <file path=ppt/slides/slide3.xml><?xml version="1.0" encoding="utf-8"?>
 <p:sld xmlns:a="http://schemas.openxmlformats.org/drawingml/2006/main" xmlns:r="http://schemas.openxmlformats.org/officeDocument/2006/relationships" xmlns:p="http://schemas.openxmlformats.org/presentationml/2006/main">
   <p:cSld>
